--- a/lab_11-linking_state_management_with_networking/lab_11-linking_state_management_with_networking.pptx
+++ b/lab_11-linking_state_management_with_networking/lab_11-linking_state_management_with_networking.pptx
@@ -11,8 +11,8 @@
     <p:sldId id="259" r:id="rId2"/>
     <p:sldId id="295" r:id="rId3"/>
     <p:sldId id="401" r:id="rId4"/>
-    <p:sldId id="398" r:id="rId5"/>
-    <p:sldId id="400" r:id="rId6"/>
+    <p:sldId id="411" r:id="rId5"/>
+    <p:sldId id="412" r:id="rId6"/>
     <p:sldId id="374" r:id="rId7"/>
     <p:sldId id="410" r:id="rId8"/>
     <p:sldId id="407" r:id="rId9"/>
@@ -207,7 +207,7 @@
           <a:p>
             <a:fld id="{81C4B3FE-0320-8142-8396-5C3025C019EC}" type="datetimeFigureOut">
               <a:rPr lang="en-IT" smtClean="0"/>
-              <a:t>5/14/24</a:t>
+              <a:t>5/19/25</a:t>
             </a:fld>
             <a:endParaRPr lang="en-IT"/>
           </a:p>
@@ -1761,7 +1761,9 @@
           <a:lstStyle>
             <a:lvl1pPr marL="0" indent="0" algn="ctr">
               <a:buNone/>
-              <a:defRPr sz="4800" b="1"/>
+              <a:defRPr sz="4800" b="1">
+                <a:latin typeface="Aptos" panose="020B0004020202020204" pitchFamily="34" charset="0"/>
+              </a:defRPr>
             </a:lvl1pPr>
             <a:lvl2pPr marL="457200" indent="0" algn="ctr">
               <a:buNone/>
@@ -1847,7 +1849,9 @@
           <a:lstStyle/>
           <a:p>
             <a:pPr algn="ctr"/>
-            <a:endParaRPr lang="en-GB" dirty="0"/>
+            <a:endParaRPr lang="en-GB" dirty="0">
+              <a:latin typeface="Aptos" panose="020B0004020202020204" pitchFamily="34" charset="0"/>
+            </a:endParaRPr>
           </a:p>
         </p:txBody>
       </p:sp>
@@ -1897,7 +1901,9 @@
           <a:lstStyle/>
           <a:p>
             <a:pPr algn="ctr"/>
-            <a:endParaRPr lang="en-GB" dirty="0"/>
+            <a:endParaRPr lang="en-GB" dirty="0">
+              <a:latin typeface="Aptos" panose="020B0004020202020204" pitchFamily="34" charset="0"/>
+            </a:endParaRPr>
           </a:p>
         </p:txBody>
       </p:sp>
@@ -1943,36 +1949,52 @@
           </a:lstStyle>
           <a:p>
             <a:r>
-              <a:rPr lang="it-IT" sz="2800" b="0" dirty="0" err="1"/>
+              <a:rPr lang="it-IT" sz="2800" b="0" dirty="0" err="1">
+                <a:latin typeface="Aptos" panose="020B0004020202020204" pitchFamily="34" charset="0"/>
+              </a:rPr>
               <a:t>Biomedical</a:t>
             </a:r>
             <a:r>
-              <a:rPr lang="it-IT" sz="2800" b="0" dirty="0"/>
+              <a:rPr lang="it-IT" sz="2800" b="0" dirty="0">
+                <a:latin typeface="Aptos" panose="020B0004020202020204" pitchFamily="34" charset="0"/>
+              </a:rPr>
               <a:t> </a:t>
             </a:r>
             <a:r>
-              <a:rPr lang="it-IT" sz="2800" b="0" dirty="0" err="1"/>
+              <a:rPr lang="it-IT" sz="2800" b="0" dirty="0" err="1">
+                <a:latin typeface="Aptos" panose="020B0004020202020204" pitchFamily="34" charset="0"/>
+              </a:rPr>
               <a:t>Wearable</a:t>
             </a:r>
             <a:r>
-              <a:rPr lang="it-IT" sz="2800" b="0" dirty="0"/>
+              <a:rPr lang="it-IT" sz="2800" b="0" dirty="0">
+                <a:latin typeface="Aptos" panose="020B0004020202020204" pitchFamily="34" charset="0"/>
+              </a:rPr>
               <a:t> Technologies </a:t>
             </a:r>
           </a:p>
           <a:p>
             <a:r>
-              <a:rPr lang="it-IT" sz="2800" b="0" dirty="0"/>
+              <a:rPr lang="it-IT" sz="2800" b="0" dirty="0">
+                <a:latin typeface="Aptos" panose="020B0004020202020204" pitchFamily="34" charset="0"/>
+              </a:rPr>
               <a:t>for Healthcare and </a:t>
             </a:r>
             <a:r>
-              <a:rPr lang="it-IT" sz="2800" b="0" dirty="0" err="1"/>
+              <a:rPr lang="it-IT" sz="2800" b="0" dirty="0" err="1">
+                <a:latin typeface="Aptos" panose="020B0004020202020204" pitchFamily="34" charset="0"/>
+              </a:rPr>
               <a:t>Wellbeing</a:t>
             </a:r>
             <a:r>
-              <a:rPr lang="it-IT" sz="2800" b="0" dirty="0"/>
+              <a:rPr lang="it-IT" sz="2800" b="0" dirty="0">
+                <a:latin typeface="Aptos" panose="020B0004020202020204" pitchFamily="34" charset="0"/>
+              </a:rPr>
               <a:t>  </a:t>
             </a:r>
-            <a:endParaRPr lang="en-GB" sz="2800" b="0" dirty="0"/>
+            <a:endParaRPr lang="en-GB" sz="2800" b="0" dirty="0">
+              <a:latin typeface="Aptos" panose="020B0004020202020204" pitchFamily="34" charset="0"/>
+            </a:endParaRPr>
           </a:p>
         </p:txBody>
       </p:sp>
@@ -2023,8 +2045,10 @@
               </a:spcAft>
             </a:pPr>
             <a:r>
-              <a:rPr lang="it-IT" sz="2800" dirty="0"/>
-              <a:t>A.Y. 2023-2024</a:t>
+              <a:rPr lang="it-IT" sz="2800" dirty="0">
+                <a:latin typeface="Aptos" panose="020B0004020202020204" pitchFamily="34" charset="0"/>
+              </a:rPr>
+              <a:t>A.Y. 2024-2025</a:t>
             </a:r>
           </a:p>
         </p:txBody>
@@ -2063,7 +2087,7 @@
                 <a:effectLst/>
                 <a:uLnTx/>
                 <a:uFillTx/>
-                <a:latin typeface="Palatino Linotype" panose="02040502050505030304" pitchFamily="18" charset="0"/>
+                <a:latin typeface="Aptos" panose="020B0004020202020204" pitchFamily="34" charset="0"/>
                 <a:ea typeface="+mj-ea"/>
                 <a:cs typeface="+mj-cs"/>
               </a:rPr>
@@ -2080,7 +2104,7 @@
                 <a:effectLst/>
                 <a:uLnTx/>
                 <a:uFillTx/>
-                <a:latin typeface="Palatino Linotype" panose="02040502050505030304" pitchFamily="18" charset="0"/>
+                <a:latin typeface="Aptos" panose="020B0004020202020204" pitchFamily="34" charset="0"/>
                 <a:ea typeface="+mj-ea"/>
                 <a:cs typeface="+mj-cs"/>
               </a:rPr>
@@ -2097,7 +2121,7 @@
                 <a:effectLst/>
                 <a:uLnTx/>
                 <a:uFillTx/>
-                <a:latin typeface="Palatino Linotype" panose="02040502050505030304" pitchFamily="18" charset="0"/>
+                <a:latin typeface="Aptos" panose="020B0004020202020204" pitchFamily="34" charset="0"/>
                 <a:ea typeface="+mj-ea"/>
                 <a:cs typeface="+mj-cs"/>
               </a:rPr>
@@ -2113,7 +2137,7 @@
                 <a:effectLst/>
                 <a:uLnTx/>
                 <a:uFillTx/>
-                <a:latin typeface="Palatino Linotype" panose="02040502050505030304" pitchFamily="18" charset="0"/>
+                <a:latin typeface="Aptos" panose="020B0004020202020204" pitchFamily="34" charset="0"/>
                 <a:ea typeface="+mj-ea"/>
                 <a:cs typeface="+mj-cs"/>
               </a:rPr>
@@ -2130,7 +2154,7 @@
                 <a:effectLst/>
                 <a:uLnTx/>
                 <a:uFillTx/>
-                <a:latin typeface="Palatino Linotype" panose="02040502050505030304" pitchFamily="18" charset="0"/>
+                <a:latin typeface="Aptos" panose="020B0004020202020204" pitchFamily="34" charset="0"/>
                 <a:ea typeface="+mj-ea"/>
                 <a:cs typeface="+mj-cs"/>
               </a:rPr>
@@ -2147,13 +2171,15 @@
                 <a:effectLst/>
                 <a:uLnTx/>
                 <a:uFillTx/>
-                <a:latin typeface="Palatino Linotype" panose="02040502050505030304" pitchFamily="18" charset="0"/>
+                <a:latin typeface="Aptos" panose="020B0004020202020204" pitchFamily="34" charset="0"/>
                 <a:ea typeface="+mj-ea"/>
                 <a:cs typeface="+mj-cs"/>
               </a:rPr>
               <a:t>Engineering</a:t>
             </a:r>
-            <a:endParaRPr lang="en-GB" sz="1100" cap="small" baseline="0" dirty="0"/>
+            <a:endParaRPr lang="en-GB" sz="1100" cap="small" baseline="0" dirty="0">
+              <a:latin typeface="Aptos" panose="020B0004020202020204" pitchFamily="34" charset="0"/>
+            </a:endParaRPr>
           </a:p>
         </p:txBody>
       </p:sp>
@@ -2263,7 +2289,9 @@
           </a:bodyPr>
           <a:lstStyle>
             <a:lvl1pPr>
-              <a:defRPr sz="3200"/>
+              <a:defRPr sz="3200">
+                <a:latin typeface="Aptos" panose="020B0004020202020204" pitchFamily="34" charset="0"/>
+              </a:defRPr>
             </a:lvl1pPr>
           </a:lstStyle>
           <a:p>
@@ -2663,12 +2691,14 @@
                     <a:tint val="75000"/>
                   </a:schemeClr>
                 </a:solidFill>
+                <a:latin typeface="Aptos" panose="020B0004020202020204" pitchFamily="34" charset="0"/>
               </a:defRPr>
             </a:lvl1pPr>
           </a:lstStyle>
           <a:p>
             <a:fld id="{31DE2C5B-556E-47B8-A792-024C2FCA4ACC}" type="slidenum">
               <a:rPr lang="en-GB" smtClean="0"/>
+              <a:pPr/>
               <a:t>‹#›</a:t>
             </a:fld>
             <a:endParaRPr lang="en-GB"/>
@@ -2703,7 +2733,7 @@
           <a:solidFill>
             <a:schemeClr val="tx1"/>
           </a:solidFill>
-          <a:latin typeface="Palatino Linotype" panose="02040502050505030304" pitchFamily="18" charset="0"/>
+          <a:latin typeface="Aptos" panose="020B0004020202020204" pitchFamily="34" charset="0"/>
           <a:ea typeface="+mj-ea"/>
           <a:cs typeface="+mj-cs"/>
         </a:defRPr>
@@ -2726,7 +2756,7 @@
           <a:solidFill>
             <a:schemeClr val="tx1"/>
           </a:solidFill>
-          <a:latin typeface="Palatino Linotype" panose="02040502050505030304" pitchFamily="18" charset="0"/>
+          <a:latin typeface="Aptos" panose="020B0004020202020204" pitchFamily="34" charset="0"/>
           <a:ea typeface="+mn-ea"/>
           <a:cs typeface="+mn-cs"/>
         </a:defRPr>
@@ -2747,7 +2777,7 @@
           <a:solidFill>
             <a:schemeClr val="tx1"/>
           </a:solidFill>
-          <a:latin typeface="Palatino Linotype" panose="02040502050505030304" pitchFamily="18" charset="0"/>
+          <a:latin typeface="Aptos" panose="020B0004020202020204" pitchFamily="34" charset="0"/>
           <a:ea typeface="+mn-ea"/>
           <a:cs typeface="+mn-cs"/>
         </a:defRPr>
@@ -2768,7 +2798,7 @@
           <a:solidFill>
             <a:schemeClr val="tx1"/>
           </a:solidFill>
-          <a:latin typeface="Palatino Linotype" panose="02040502050505030304" pitchFamily="18" charset="0"/>
+          <a:latin typeface="Aptos" panose="020B0004020202020204" pitchFamily="34" charset="0"/>
           <a:ea typeface="+mn-ea"/>
           <a:cs typeface="+mn-cs"/>
         </a:defRPr>
@@ -2789,7 +2819,7 @@
           <a:solidFill>
             <a:schemeClr val="tx1"/>
           </a:solidFill>
-          <a:latin typeface="Palatino Linotype" panose="02040502050505030304" pitchFamily="18" charset="0"/>
+          <a:latin typeface="Aptos" panose="020B0004020202020204" pitchFamily="34" charset="0"/>
           <a:ea typeface="+mn-ea"/>
           <a:cs typeface="+mn-cs"/>
         </a:defRPr>
@@ -2810,7 +2840,7 @@
           <a:solidFill>
             <a:schemeClr val="tx1"/>
           </a:solidFill>
-          <a:latin typeface="Palatino Linotype" panose="02040502050505030304" pitchFamily="18" charset="0"/>
+          <a:latin typeface="Aptos" panose="020B0004020202020204" pitchFamily="34" charset="0"/>
           <a:ea typeface="+mn-ea"/>
           <a:cs typeface="+mn-cs"/>
         </a:defRPr>
@@ -3501,7 +3531,9 @@
           </a:lstStyle>
           <a:p>
             <a:r>
-              <a:rPr lang="en-US" dirty="0"/>
+              <a:rPr lang="en-US" dirty="0">
+                <a:latin typeface="Aptos" panose="020B0004020202020204" pitchFamily="34" charset="0"/>
+              </a:rPr>
               <a:t>Get familiar with the example</a:t>
             </a:r>
           </a:p>
@@ -3885,7 +3917,7 @@
             </a:r>
             <a:r>
               <a:rPr lang="en-IT" sz="1600" dirty="0">
-                <a:latin typeface="Palatino Linotype" panose="02040502050505030304" pitchFamily="18" charset="0"/>
+                <a:latin typeface="Aptos" panose="020B0004020202020204" pitchFamily="34" charset="0"/>
               </a:rPr>
               <a:t>is called</a:t>
             </a:r>
@@ -3923,13 +3955,13 @@
             <a:pPr algn="ctr"/>
             <a:r>
               <a:rPr lang="en-US" dirty="0">
-                <a:latin typeface="Palatino Linotype" panose="02040502050505030304" pitchFamily="18" charset="0"/>
+                <a:latin typeface="Aptos" panose="020B0004020202020204" pitchFamily="34" charset="0"/>
               </a:rPr>
               <a:t>Flutter calls</a:t>
             </a:r>
             <a:r>
               <a:rPr lang="en-IT">
-                <a:latin typeface="Palatino Linotype" panose="02040502050505030304" pitchFamily="18" charset="0"/>
+                <a:latin typeface="Aptos" panose="020B0004020202020204" pitchFamily="34" charset="0"/>
               </a:rPr>
               <a:t> </a:t>
             </a:r>
@@ -3941,7 +3973,7 @@
             </a:r>
             <a:r>
               <a:rPr lang="en-IT" dirty="0">
-                <a:latin typeface="Palatino Linotype" panose="02040502050505030304" pitchFamily="18" charset="0"/>
+                <a:latin typeface="Aptos" panose="020B0004020202020204" pitchFamily="34" charset="0"/>
               </a:rPr>
               <a:t>method</a:t>
             </a:r>
@@ -4542,13 +4574,13 @@
             <a:pPr algn="ctr"/>
             <a:r>
               <a:rPr lang="en-GB" dirty="0">
-                <a:latin typeface="Palatino Linotype" panose="02040502050505030304" pitchFamily="18" charset="0"/>
+                <a:latin typeface="Aptos" panose="020B0004020202020204" pitchFamily="34" charset="0"/>
               </a:rPr>
               <a:t>C</a:t>
             </a:r>
             <a:r>
               <a:rPr lang="en-IT" dirty="0">
-                <a:latin typeface="Palatino Linotype" panose="02040502050505030304" pitchFamily="18" charset="0"/>
+                <a:latin typeface="Aptos" panose="020B0004020202020204" pitchFamily="34" charset="0"/>
               </a:rPr>
               <a:t>hild widget tree </a:t>
             </a:r>
@@ -4658,7 +4690,7 @@
         </p:nvSpPr>
         <p:spPr>
           <a:xfrm>
-            <a:off x="4216449" y="3740816"/>
+            <a:off x="4191790" y="3761933"/>
             <a:ext cx="1357060" cy="584775"/>
           </a:xfrm>
           <a:prstGeom prst="rect">
@@ -4673,12 +4705,12 @@
           <a:p>
             <a:r>
               <a:rPr lang="en-GB" sz="1600" dirty="0">
-                <a:latin typeface="Palatino Linotype" panose="02040502050505030304" pitchFamily="18" charset="0"/>
+                <a:latin typeface="Aptos" panose="020B0004020202020204" pitchFamily="34" charset="0"/>
               </a:rPr>
               <a:t>Inject an instance to</a:t>
             </a:r>
             <a:endParaRPr lang="en-IT" sz="1600" dirty="0">
-              <a:latin typeface="Palatino Linotype" panose="02040502050505030304" pitchFamily="18" charset="0"/>
+              <a:latin typeface="Aptos" panose="020B0004020202020204" pitchFamily="34" charset="0"/>
             </a:endParaRPr>
           </a:p>
         </p:txBody>
@@ -5013,7 +5045,7 @@
               <a:rPr lang="en-GB" smtClean="0"/>
               <a:t>3</a:t>
             </a:fld>
-            <a:endParaRPr lang="en-GB"/>
+            <a:endParaRPr lang="en-GB" dirty="0"/>
           </a:p>
         </p:txBody>
       </p:sp>
@@ -5228,14 +5260,20 @@
               <a:buNone/>
             </a:pPr>
             <a:r>
-              <a:rPr lang="en-IT" b="1"/>
+              <a:rPr lang="en-IT" b="1">
+                <a:latin typeface="Aptos" panose="020B0004020202020204" pitchFamily="34" charset="0"/>
+              </a:rPr>
               <a:t>Lesson </a:t>
             </a:r>
             <a:r>
-              <a:rPr lang="en-US" b="1" dirty="0"/>
+              <a:rPr lang="en-US" b="1" dirty="0">
+                <a:latin typeface="Aptos" panose="020B0004020202020204" pitchFamily="34" charset="0"/>
+              </a:rPr>
               <a:t>7</a:t>
             </a:r>
-            <a:endParaRPr lang="en-IT" b="1" dirty="0"/>
+            <a:endParaRPr lang="en-IT" b="1" dirty="0">
+              <a:latin typeface="Aptos" panose="020B0004020202020204" pitchFamily="34" charset="0"/>
+            </a:endParaRPr>
           </a:p>
         </p:txBody>
       </p:sp>
@@ -5293,12 +5331,8 @@
           <a:lstStyle/>
           <a:p>
             <a:r>
-              <a:rPr lang="en-IT" dirty="0"/>
-              <a:t>Recap</a:t>
-            </a:r>
-            <a:r>
               <a:rPr lang="en-IT"/>
-              <a:t>: </a:t>
+              <a:t>Recap: </a:t>
             </a:r>
             <a:r>
               <a:rPr lang="en-US" dirty="0"/>
@@ -5671,6 +5705,7 @@
                 <a:solidFill>
                   <a:srgbClr val="C00000"/>
                 </a:solidFill>
+                <a:latin typeface="Aptos" panose="020B0004020202020204" pitchFamily="34" charset="0"/>
               </a:rPr>
               <a:t>https://impact.dei.unipd.it/bwthw/</a:t>
             </a:r>
@@ -5979,7 +6014,9 @@
               <a:buNone/>
             </a:pPr>
             <a:r>
-              <a:rPr lang="en-IT" sz="1400" dirty="0"/>
+              <a:rPr lang="en-IT" sz="1400" dirty="0">
+                <a:latin typeface="Aptos" panose="020B0004020202020204" pitchFamily="34" charset="0"/>
+              </a:rPr>
               <a:t>Your app</a:t>
             </a:r>
           </a:p>
@@ -6197,7 +6234,9 @@
               <a:buNone/>
             </a:pPr>
             <a:r>
-              <a:rPr lang="en-IT" sz="1600" b="1" dirty="0"/>
+              <a:rPr lang="en-IT" sz="1600" b="1" dirty="0">
+                <a:latin typeface="Aptos" panose="020B0004020202020204" pitchFamily="34" charset="0"/>
+              </a:rPr>
               <a:t>HTTPS requests/responses</a:t>
             </a:r>
           </a:p>
@@ -6290,7 +6329,9 @@
           <a:lstStyle/>
           <a:p>
             <a:pPr algn="ctr"/>
-            <a:endParaRPr lang="en-IT"/>
+            <a:endParaRPr lang="en-IT">
+              <a:latin typeface="Aptos" panose="020B0004020202020204" pitchFamily="34" charset="0"/>
+            </a:endParaRPr>
           </a:p>
         </p:txBody>
       </p:sp>
@@ -6506,7 +6547,9 @@
               <a:buNone/>
             </a:pPr>
             <a:r>
-              <a:rPr lang="en-IT" sz="1400" dirty="0"/>
+              <a:rPr lang="en-IT" sz="1400" dirty="0">
+                <a:latin typeface="Aptos" panose="020B0004020202020204" pitchFamily="34" charset="0"/>
+              </a:rPr>
               <a:t>(If credentials are ok) Receive token</a:t>
             </a:r>
           </a:p>
@@ -6804,7 +6847,9 @@
               <a:buNone/>
             </a:pPr>
             <a:r>
-              <a:rPr lang="en-IT" sz="1400" dirty="0"/>
+              <a:rPr lang="en-IT" sz="1400" dirty="0">
+                <a:latin typeface="Aptos" panose="020B0004020202020204" pitchFamily="34" charset="0"/>
+              </a:rPr>
               <a:t>Ask for specific data using token</a:t>
             </a:r>
           </a:p>
@@ -7063,7 +7108,9 @@
               <a:buNone/>
             </a:pPr>
             <a:r>
-              <a:rPr lang="en-IT" sz="1400" dirty="0"/>
+              <a:rPr lang="en-IT" sz="1400" dirty="0">
+                <a:latin typeface="Aptos" panose="020B0004020202020204" pitchFamily="34" charset="0"/>
+              </a:rPr>
               <a:t>(If request is ok) Receive data (JSON format)</a:t>
             </a:r>
           </a:p>
@@ -7233,7 +7280,9 @@
           <a:lstStyle/>
           <a:p>
             <a:pPr algn="ctr"/>
-            <a:endParaRPr lang="en-IT"/>
+            <a:endParaRPr lang="en-IT">
+              <a:latin typeface="Aptos" panose="020B0004020202020204" pitchFamily="34" charset="0"/>
+            </a:endParaRPr>
           </a:p>
         </p:txBody>
       </p:sp>
@@ -7282,7 +7331,9 @@
           <a:lstStyle/>
           <a:p>
             <a:pPr algn="ctr"/>
-            <a:endParaRPr lang="en-IT"/>
+            <a:endParaRPr lang="en-IT">
+              <a:latin typeface="Aptos" panose="020B0004020202020204" pitchFamily="34" charset="0"/>
+            </a:endParaRPr>
           </a:p>
         </p:txBody>
       </p:sp>
@@ -7497,7 +7548,9 @@
               <a:buNone/>
             </a:pPr>
             <a:r>
-              <a:rPr lang="en-IT" b="1" dirty="0"/>
+              <a:rPr lang="en-IT" b="1" dirty="0">
+                <a:latin typeface="Aptos" panose="020B0004020202020204" pitchFamily="34" charset="0"/>
+              </a:rPr>
               <a:t>Lesson 9</a:t>
             </a:r>
           </a:p>
@@ -7714,7 +7767,9 @@
               <a:buNone/>
             </a:pPr>
             <a:r>
-              <a:rPr lang="en-IT" b="1" dirty="0"/>
+              <a:rPr lang="en-IT" b="1" dirty="0">
+                <a:latin typeface="Aptos" panose="020B0004020202020204" pitchFamily="34" charset="0"/>
+              </a:rPr>
               <a:t>Lesson 10</a:t>
             </a:r>
           </a:p>
@@ -7806,7 +7861,7 @@
     </p:spTree>
     <p:extLst>
       <p:ext uri="{BB962C8B-B14F-4D97-AF65-F5344CB8AC3E}">
-        <p14:creationId xmlns:p14="http://schemas.microsoft.com/office/powerpoint/2010/main" val="1807656441"/>
+        <p14:creationId xmlns:p14="http://schemas.microsoft.com/office/powerpoint/2010/main" val="121948299"/>
       </p:ext>
     </p:extLst>
   </p:cSld>
@@ -7948,7 +8003,7 @@
             <a:pPr algn="ctr"/>
             <a:r>
               <a:rPr lang="en-IT" dirty="0">
-                <a:latin typeface="Palatino Linotype" panose="02040502050505030304" pitchFamily="18" charset="0"/>
+                <a:latin typeface="Aptos" panose="020B0004020202020204" pitchFamily="34" charset="0"/>
               </a:rPr>
               <a:t>Use credentials to ask for a JWT token pair</a:t>
             </a:r>
@@ -7998,7 +8053,7 @@
             <a:pPr algn="ctr"/>
             <a:r>
               <a:rPr lang="en-IT" dirty="0">
-                <a:latin typeface="Palatino Linotype" panose="02040502050505030304" pitchFamily="18" charset="0"/>
+                <a:latin typeface="Aptos" panose="020B0004020202020204" pitchFamily="34" charset="0"/>
               </a:rPr>
               <a:t>Receive JWT token pair</a:t>
             </a:r>
@@ -8048,7 +8103,7 @@
             <a:pPr algn="ctr"/>
             <a:r>
               <a:rPr lang="en-IT" dirty="0">
-                <a:latin typeface="Palatino Linotype" panose="02040502050505030304" pitchFamily="18" charset="0"/>
+                <a:latin typeface="Aptos" panose="020B0004020202020204" pitchFamily="34" charset="0"/>
               </a:rPr>
               <a:t>Store token pair for making calls</a:t>
             </a:r>
@@ -8184,7 +8239,7 @@
             <a:pPr algn="ctr"/>
             <a:r>
               <a:rPr lang="en-IT" dirty="0">
-                <a:latin typeface="Palatino Linotype" panose="02040502050505030304" pitchFamily="18" charset="0"/>
+                <a:latin typeface="Aptos" panose="020B0004020202020204" pitchFamily="34" charset="0"/>
               </a:rPr>
               <a:t>Access token expired?</a:t>
             </a:r>
@@ -8234,7 +8289,7 @@
             <a:pPr algn="ctr"/>
             <a:r>
               <a:rPr lang="en-IT" dirty="0">
-                <a:latin typeface="Palatino Linotype" panose="02040502050505030304" pitchFamily="18" charset="0"/>
+                <a:latin typeface="Aptos" panose="020B0004020202020204" pitchFamily="34" charset="0"/>
               </a:rPr>
               <a:t>Make a call to get data using access token</a:t>
             </a:r>
@@ -8630,6 +8685,7 @@
                 <a:solidFill>
                   <a:srgbClr val="C00000"/>
                 </a:solidFill>
+                <a:latin typeface="Aptos" panose="020B0004020202020204" pitchFamily="34" charset="0"/>
               </a:rPr>
               <a:t>YES</a:t>
             </a:r>
@@ -8852,6 +8908,7 @@
                 <a:solidFill>
                   <a:srgbClr val="C00000"/>
                 </a:solidFill>
+                <a:latin typeface="Aptos" panose="020B0004020202020204" pitchFamily="34" charset="0"/>
               </a:rPr>
               <a:t>NO</a:t>
             </a:r>
@@ -8944,7 +9001,7 @@
             <a:pPr algn="ctr"/>
             <a:r>
               <a:rPr lang="en-IT" dirty="0">
-                <a:latin typeface="Palatino Linotype" panose="02040502050505030304" pitchFamily="18" charset="0"/>
+                <a:latin typeface="Aptos" panose="020B0004020202020204" pitchFamily="34" charset="0"/>
               </a:rPr>
               <a:t>Refresh token expired?</a:t>
             </a:r>
@@ -8994,7 +9051,7 @@
             <a:pPr algn="ctr"/>
             <a:r>
               <a:rPr lang="en-IT" dirty="0">
-                <a:latin typeface="Palatino Linotype" panose="02040502050505030304" pitchFamily="18" charset="0"/>
+                <a:latin typeface="Aptos" panose="020B0004020202020204" pitchFamily="34" charset="0"/>
               </a:rPr>
               <a:t>Get a new token pair using the refresh token and store it</a:t>
             </a:r>
@@ -9259,6 +9316,7 @@
                 <a:solidFill>
                   <a:srgbClr val="C00000"/>
                 </a:solidFill>
+                <a:latin typeface="Aptos" panose="020B0004020202020204" pitchFamily="34" charset="0"/>
               </a:rPr>
               <a:t>YES</a:t>
             </a:r>
@@ -9481,6 +9539,7 @@
                 <a:solidFill>
                   <a:srgbClr val="C00000"/>
                 </a:solidFill>
+                <a:latin typeface="Aptos" panose="020B0004020202020204" pitchFamily="34" charset="0"/>
               </a:rPr>
               <a:t>NO</a:t>
             </a:r>
@@ -9507,271 +9566,6 @@
           <a:xfrm>
             <a:off x="1594847" y="4946860"/>
             <a:ext cx="362090" cy="903399"/>
-          </a:xfrm>
-          <a:prstGeom prst="straightConnector1">
-            <a:avLst/>
-          </a:prstGeom>
-          <a:ln>
-            <a:tailEnd type="triangle"/>
-          </a:ln>
-        </p:spPr>
-        <p:style>
-          <a:lnRef idx="1">
-            <a:schemeClr val="dk1"/>
-          </a:lnRef>
-          <a:fillRef idx="0">
-            <a:schemeClr val="dk1"/>
-          </a:fillRef>
-          <a:effectRef idx="0">
-            <a:schemeClr val="dk1"/>
-          </a:effectRef>
-          <a:fontRef idx="minor">
-            <a:schemeClr val="tx1"/>
-          </a:fontRef>
-        </p:style>
-      </p:cxnSp>
-      <p:sp>
-        <p:nvSpPr>
-          <p:cNvPr id="3" name="Content Placeholder 2">
-            <a:extLst>
-              <a:ext uri="{FF2B5EF4-FFF2-40B4-BE49-F238E27FC236}">
-                <a16:creationId xmlns:a16="http://schemas.microsoft.com/office/drawing/2014/main" id="{0B06549E-B1F7-94C7-679E-C204EFA28916}"/>
-              </a:ext>
-            </a:extLst>
-          </p:cNvPr>
-          <p:cNvSpPr txBox="1">
-            <a:spLocks/>
-          </p:cNvSpPr>
-          <p:nvPr/>
-        </p:nvSpPr>
-        <p:spPr>
-          <a:xfrm>
-            <a:off x="9611394" y="1650775"/>
-            <a:ext cx="1677133" cy="604041"/>
-          </a:xfrm>
-          <a:prstGeom prst="rect">
-            <a:avLst/>
-          </a:prstGeom>
-        </p:spPr>
-        <p:txBody>
-          <a:bodyPr vert="horz" lIns="91440" tIns="45720" rIns="91440" bIns="45720" rtlCol="0">
-            <a:normAutofit/>
-          </a:bodyPr>
-          <a:lstStyle>
-            <a:lvl1pPr marL="342900" indent="-342900" algn="l" defTabSz="914400" rtl="0" eaLnBrk="1" latinLnBrk="0" hangingPunct="1">
-              <a:lnSpc>
-                <a:spcPct val="90000"/>
-              </a:lnSpc>
-              <a:spcBef>
-                <a:spcPts val="1000"/>
-              </a:spcBef>
-              <a:buClr>
-                <a:srgbClr val="00B050"/>
-              </a:buClr>
-              <a:buFont typeface="Wingdings" panose="05000000000000000000" pitchFamily="2" charset="2"/>
-              <a:buChar char="Ø"/>
-              <a:defRPr sz="2400" kern="1200">
-                <a:solidFill>
-                  <a:schemeClr val="tx1"/>
-                </a:solidFill>
-                <a:latin typeface="Palatino Linotype" panose="02040502050505030304" pitchFamily="18" charset="0"/>
-                <a:ea typeface="+mn-ea"/>
-                <a:cs typeface="+mn-cs"/>
-              </a:defRPr>
-            </a:lvl1pPr>
-            <a:lvl2pPr marL="685800" indent="-228600" algn="l" defTabSz="914400" rtl="0" eaLnBrk="1" latinLnBrk="0" hangingPunct="1">
-              <a:lnSpc>
-                <a:spcPct val="90000"/>
-              </a:lnSpc>
-              <a:spcBef>
-                <a:spcPts val="500"/>
-              </a:spcBef>
-              <a:buClr>
-                <a:srgbClr val="00B050"/>
-              </a:buClr>
-              <a:buFont typeface="Wingdings" panose="05000000000000000000" pitchFamily="2" charset="2"/>
-              <a:buChar char="§"/>
-              <a:defRPr sz="2000" kern="1200">
-                <a:solidFill>
-                  <a:schemeClr val="tx1"/>
-                </a:solidFill>
-                <a:latin typeface="Palatino Linotype" panose="02040502050505030304" pitchFamily="18" charset="0"/>
-                <a:ea typeface="+mn-ea"/>
-                <a:cs typeface="+mn-cs"/>
-              </a:defRPr>
-            </a:lvl2pPr>
-            <a:lvl3pPr marL="1143000" indent="-228600" algn="l" defTabSz="914400" rtl="0" eaLnBrk="1" latinLnBrk="0" hangingPunct="1">
-              <a:lnSpc>
-                <a:spcPct val="90000"/>
-              </a:lnSpc>
-              <a:spcBef>
-                <a:spcPts val="500"/>
-              </a:spcBef>
-              <a:buClr>
-                <a:srgbClr val="00B050"/>
-              </a:buClr>
-              <a:buFont typeface="Arial" panose="020B0604020202020204" pitchFamily="34" charset="0"/>
-              <a:buChar char="•"/>
-              <a:defRPr sz="1800" kern="1200">
-                <a:solidFill>
-                  <a:schemeClr val="tx1"/>
-                </a:solidFill>
-                <a:latin typeface="Palatino Linotype" panose="02040502050505030304" pitchFamily="18" charset="0"/>
-                <a:ea typeface="+mn-ea"/>
-                <a:cs typeface="+mn-cs"/>
-              </a:defRPr>
-            </a:lvl3pPr>
-            <a:lvl4pPr marL="1600200" indent="-228600" algn="l" defTabSz="914400" rtl="0" eaLnBrk="1" latinLnBrk="0" hangingPunct="1">
-              <a:lnSpc>
-                <a:spcPct val="90000"/>
-              </a:lnSpc>
-              <a:spcBef>
-                <a:spcPts val="500"/>
-              </a:spcBef>
-              <a:buClr>
-                <a:srgbClr val="00B050"/>
-              </a:buClr>
-              <a:buFont typeface="Courier New" panose="02070309020205020404" pitchFamily="49" charset="0"/>
-              <a:buChar char="o"/>
-              <a:defRPr sz="1600" kern="1200">
-                <a:solidFill>
-                  <a:schemeClr val="tx1"/>
-                </a:solidFill>
-                <a:latin typeface="Palatino Linotype" panose="02040502050505030304" pitchFamily="18" charset="0"/>
-                <a:ea typeface="+mn-ea"/>
-                <a:cs typeface="+mn-cs"/>
-              </a:defRPr>
-            </a:lvl4pPr>
-            <a:lvl5pPr marL="2057400" indent="-228600" algn="l" defTabSz="914400" rtl="0" eaLnBrk="1" latinLnBrk="0" hangingPunct="1">
-              <a:lnSpc>
-                <a:spcPct val="90000"/>
-              </a:lnSpc>
-              <a:spcBef>
-                <a:spcPts val="500"/>
-              </a:spcBef>
-              <a:buClr>
-                <a:srgbClr val="00B050"/>
-              </a:buClr>
-              <a:buFont typeface="Times New Roman" panose="02020603050405020304" pitchFamily="18" charset="0"/>
-              <a:buChar char="̶"/>
-              <a:defRPr sz="1600" kern="1200">
-                <a:solidFill>
-                  <a:schemeClr val="tx1"/>
-                </a:solidFill>
-                <a:latin typeface="Palatino Linotype" panose="02040502050505030304" pitchFamily="18" charset="0"/>
-                <a:ea typeface="+mn-ea"/>
-                <a:cs typeface="+mn-cs"/>
-              </a:defRPr>
-            </a:lvl5pPr>
-            <a:lvl6pPr marL="2514600" indent="-228600" algn="l" defTabSz="914400" rtl="0" eaLnBrk="1" latinLnBrk="0" hangingPunct="1">
-              <a:lnSpc>
-                <a:spcPct val="90000"/>
-              </a:lnSpc>
-              <a:spcBef>
-                <a:spcPts val="500"/>
-              </a:spcBef>
-              <a:buFont typeface="Arial" panose="020B0604020202020204" pitchFamily="34" charset="0"/>
-              <a:buChar char="•"/>
-              <a:defRPr sz="1800" kern="1200">
-                <a:solidFill>
-                  <a:schemeClr val="tx1"/>
-                </a:solidFill>
-                <a:latin typeface="+mn-lt"/>
-                <a:ea typeface="+mn-ea"/>
-                <a:cs typeface="+mn-cs"/>
-              </a:defRPr>
-            </a:lvl6pPr>
-            <a:lvl7pPr marL="2971800" indent="-228600" algn="l" defTabSz="914400" rtl="0" eaLnBrk="1" latinLnBrk="0" hangingPunct="1">
-              <a:lnSpc>
-                <a:spcPct val="90000"/>
-              </a:lnSpc>
-              <a:spcBef>
-                <a:spcPts val="500"/>
-              </a:spcBef>
-              <a:buFont typeface="Arial" panose="020B0604020202020204" pitchFamily="34" charset="0"/>
-              <a:buChar char="•"/>
-              <a:defRPr sz="1800" kern="1200">
-                <a:solidFill>
-                  <a:schemeClr val="tx1"/>
-                </a:solidFill>
-                <a:latin typeface="+mn-lt"/>
-                <a:ea typeface="+mn-ea"/>
-                <a:cs typeface="+mn-cs"/>
-              </a:defRPr>
-            </a:lvl7pPr>
-            <a:lvl8pPr marL="3429000" indent="-228600" algn="l" defTabSz="914400" rtl="0" eaLnBrk="1" latinLnBrk="0" hangingPunct="1">
-              <a:lnSpc>
-                <a:spcPct val="90000"/>
-              </a:lnSpc>
-              <a:spcBef>
-                <a:spcPts val="500"/>
-              </a:spcBef>
-              <a:buFont typeface="Arial" panose="020B0604020202020204" pitchFamily="34" charset="0"/>
-              <a:buChar char="•"/>
-              <a:defRPr sz="1800" kern="1200">
-                <a:solidFill>
-                  <a:schemeClr val="tx1"/>
-                </a:solidFill>
-                <a:latin typeface="+mn-lt"/>
-                <a:ea typeface="+mn-ea"/>
-                <a:cs typeface="+mn-cs"/>
-              </a:defRPr>
-            </a:lvl8pPr>
-            <a:lvl9pPr marL="3886200" indent="-228600" algn="l" defTabSz="914400" rtl="0" eaLnBrk="1" latinLnBrk="0" hangingPunct="1">
-              <a:lnSpc>
-                <a:spcPct val="90000"/>
-              </a:lnSpc>
-              <a:spcBef>
-                <a:spcPts val="500"/>
-              </a:spcBef>
-              <a:buFont typeface="Arial" panose="020B0604020202020204" pitchFamily="34" charset="0"/>
-              <a:buChar char="•"/>
-              <a:defRPr sz="1800" kern="1200">
-                <a:solidFill>
-                  <a:schemeClr val="tx1"/>
-                </a:solidFill>
-                <a:latin typeface="+mn-lt"/>
-                <a:ea typeface="+mn-ea"/>
-                <a:cs typeface="+mn-cs"/>
-              </a:defRPr>
-            </a:lvl9pPr>
-          </a:lstStyle>
-          <a:p>
-            <a:pPr marL="0" indent="0">
-              <a:buNone/>
-            </a:pPr>
-            <a:r>
-              <a:rPr lang="en-IT" b="1"/>
-              <a:t>Lesson </a:t>
-            </a:r>
-            <a:r>
-              <a:rPr lang="en-US" b="1" dirty="0"/>
-              <a:t>8</a:t>
-            </a:r>
-            <a:endParaRPr lang="en-IT" b="1" dirty="0"/>
-          </a:p>
-        </p:txBody>
-      </p:sp>
-      <p:cxnSp>
-        <p:nvCxnSpPr>
-          <p:cNvPr id="5" name="Straight Arrow Connector 4">
-            <a:extLst>
-              <a:ext uri="{FF2B5EF4-FFF2-40B4-BE49-F238E27FC236}">
-                <a16:creationId xmlns:a16="http://schemas.microsoft.com/office/drawing/2014/main" id="{FF9A5165-262D-E635-C2EF-8E380160CBA2}"/>
-              </a:ext>
-            </a:extLst>
-          </p:cNvPr>
-          <p:cNvCxnSpPr>
-            <a:cxnSpLocks/>
-            <a:stCxn id="25" idx="3"/>
-            <a:endCxn id="3" idx="1"/>
-          </p:cNvCxnSpPr>
-          <p:nvPr/>
-        </p:nvCxnSpPr>
-        <p:spPr>
-          <a:xfrm flipV="1">
-            <a:off x="7170769" y="1952796"/>
-            <a:ext cx="2440625" cy="767631"/>
           </a:xfrm>
           <a:prstGeom prst="straightConnector1">
             <a:avLst/>
@@ -9798,7 +9592,7 @@
     </p:spTree>
     <p:extLst>
       <p:ext uri="{BB962C8B-B14F-4D97-AF65-F5344CB8AC3E}">
-        <p14:creationId xmlns:p14="http://schemas.microsoft.com/office/powerpoint/2010/main" val="1048633781"/>
+        <p14:creationId xmlns:p14="http://schemas.microsoft.com/office/powerpoint/2010/main" val="1703188139"/>
       </p:ext>
     </p:extLst>
   </p:cSld>
@@ -10065,12 +9859,12 @@
             <a:pPr algn="ctr"/>
             <a:r>
               <a:rPr lang="en-US" dirty="0">
-                <a:latin typeface="Palatino Linotype" panose="02040502050505030304" pitchFamily="18" charset="0"/>
+                <a:latin typeface="Aptos" panose="020B0004020202020204" pitchFamily="34" charset="0"/>
               </a:rPr>
               <a:t>Create request and get the response</a:t>
             </a:r>
             <a:endParaRPr lang="en-IT" dirty="0">
-              <a:latin typeface="Palatino Linotype" panose="02040502050505030304" pitchFamily="18" charset="0"/>
+              <a:latin typeface="Aptos" panose="020B0004020202020204" pitchFamily="34" charset="0"/>
             </a:endParaRPr>
           </a:p>
         </p:txBody>
@@ -10122,12 +9916,12 @@
             <a:pPr algn="ctr"/>
             <a:r>
               <a:rPr lang="en-US" dirty="0">
-                <a:latin typeface="Palatino Linotype" panose="02040502050505030304" pitchFamily="18" charset="0"/>
+                <a:latin typeface="Aptos" panose="020B0004020202020204" pitchFamily="34" charset="0"/>
               </a:rPr>
               <a:t>“Event” that asks to fetch data</a:t>
             </a:r>
             <a:endParaRPr lang="en-IT" dirty="0">
-              <a:latin typeface="Palatino Linotype" panose="02040502050505030304" pitchFamily="18" charset="0"/>
+              <a:latin typeface="Aptos" panose="020B0004020202020204" pitchFamily="34" charset="0"/>
             </a:endParaRPr>
           </a:p>
         </p:txBody>
@@ -10175,12 +9969,12 @@
             <a:pPr algn="ctr"/>
             <a:r>
               <a:rPr lang="en-US" dirty="0">
-                <a:latin typeface="Palatino Linotype" panose="02040502050505030304" pitchFamily="18" charset="0"/>
+                <a:latin typeface="Aptos" panose="020B0004020202020204" pitchFamily="34" charset="0"/>
               </a:rPr>
               <a:t>“Manage” response</a:t>
             </a:r>
             <a:endParaRPr lang="en-IT" dirty="0">
-              <a:latin typeface="Palatino Linotype" panose="02040502050505030304" pitchFamily="18" charset="0"/>
+              <a:latin typeface="Aptos" panose="020B0004020202020204" pitchFamily="34" charset="0"/>
             </a:endParaRPr>
           </a:p>
         </p:txBody>
@@ -10233,12 +10027,12 @@
             <a:pPr algn="ctr"/>
             <a:r>
               <a:rPr lang="en-US" dirty="0">
-                <a:latin typeface="Palatino Linotype" panose="02040502050505030304" pitchFamily="18" charset="0"/>
+                <a:latin typeface="Aptos" panose="020B0004020202020204" pitchFamily="34" charset="0"/>
               </a:rPr>
               <a:t>Trigger the builders</a:t>
             </a:r>
             <a:endParaRPr lang="en-IT">
-              <a:latin typeface="Palatino Linotype" panose="02040502050505030304" pitchFamily="18" charset="0"/>
+              <a:latin typeface="Aptos" panose="020B0004020202020204" pitchFamily="34" charset="0"/>
             </a:endParaRPr>
           </a:p>
         </p:txBody>
@@ -10274,7 +10068,7 @@
             <a:pPr algn="ctr"/>
             <a:r>
               <a:rPr lang="en-US" sz="2800" b="1" dirty="0">
-                <a:latin typeface="Palatino Linotype" panose="02040502050505030304" pitchFamily="18" charset="0"/>
+                <a:latin typeface="Aptos" panose="020B0004020202020204" pitchFamily="34" charset="0"/>
               </a:rPr>
               <a:t>WHAT</a:t>
             </a:r>
@@ -10312,7 +10106,7 @@
             <a:pPr algn="ctr"/>
             <a:r>
               <a:rPr lang="en-US" sz="2800" b="1" dirty="0">
-                <a:latin typeface="Palatino Linotype" panose="02040502050505030304" pitchFamily="18" charset="0"/>
+                <a:latin typeface="Aptos" panose="020B0004020202020204" pitchFamily="34" charset="0"/>
               </a:rPr>
               <a:t>WHERE</a:t>
             </a:r>
@@ -10350,7 +10144,7 @@
             <a:pPr algn="ctr"/>
             <a:r>
               <a:rPr lang="en-US" dirty="0">
-                <a:latin typeface="Palatino Linotype" panose="02040502050505030304" pitchFamily="18" charset="0"/>
+                <a:latin typeface="Aptos" panose="020B0004020202020204" pitchFamily="34" charset="0"/>
               </a:rPr>
               <a:t>Everywhere in your application</a:t>
             </a:r>
@@ -10388,7 +10182,7 @@
             <a:pPr algn="ctr"/>
             <a:r>
               <a:rPr lang="en-US" sz="2800" b="1" dirty="0">
-                <a:latin typeface="Palatino Linotype" panose="02040502050505030304" pitchFamily="18" charset="0"/>
+                <a:latin typeface="Aptos" panose="020B0004020202020204" pitchFamily="34" charset="0"/>
               </a:rPr>
               <a:t>HOW</a:t>
             </a:r>
@@ -10426,7 +10220,7 @@
             <a:pPr algn="ctr"/>
             <a:r>
               <a:rPr lang="en-US" dirty="0">
-                <a:latin typeface="Palatino Linotype" panose="02040502050505030304" pitchFamily="18" charset="0"/>
+                <a:latin typeface="Aptos" panose="020B0004020202020204" pitchFamily="34" charset="0"/>
               </a:rPr>
               <a:t>In the provider (the class that is extending </a:t>
             </a:r>
@@ -10439,7 +10233,7 @@
             </a:r>
             <a:r>
               <a:rPr lang="en-US" dirty="0">
-                <a:latin typeface="Palatino Linotype" panose="02040502050505030304" pitchFamily="18" charset="0"/>
+                <a:latin typeface="Aptos" panose="020B0004020202020204" pitchFamily="34" charset="0"/>
               </a:rPr>
               <a:t>)</a:t>
             </a:r>
@@ -10477,7 +10271,7 @@
             <a:pPr algn="ctr"/>
             <a:r>
               <a:rPr lang="en-US" dirty="0">
-                <a:latin typeface="Palatino Linotype" panose="02040502050505030304" pitchFamily="18" charset="0"/>
+                <a:latin typeface="Aptos" panose="020B0004020202020204" pitchFamily="34" charset="0"/>
               </a:rPr>
               <a:t>In the provider (the class that is extending </a:t>
             </a:r>
@@ -10490,7 +10284,7 @@
             </a:r>
             <a:r>
               <a:rPr lang="en-US" dirty="0">
-                <a:latin typeface="Palatino Linotype" panose="02040502050505030304" pitchFamily="18" charset="0"/>
+                <a:latin typeface="Aptos" panose="020B0004020202020204" pitchFamily="34" charset="0"/>
               </a:rPr>
               <a:t>)</a:t>
             </a:r>
@@ -10528,7 +10322,7 @@
             <a:pPr algn="ctr"/>
             <a:r>
               <a:rPr lang="en-US" dirty="0">
-                <a:latin typeface="Palatino Linotype" panose="02040502050505030304" pitchFamily="18" charset="0"/>
+                <a:latin typeface="Aptos" panose="020B0004020202020204" pitchFamily="34" charset="0"/>
               </a:rPr>
               <a:t>Everywhere in your application (where needed)</a:t>
             </a:r>
@@ -10583,12 +10377,12 @@
             <a:pPr algn="ctr"/>
             <a:r>
               <a:rPr lang="en-US" dirty="0">
-                <a:latin typeface="Palatino Linotype" panose="02040502050505030304" pitchFamily="18" charset="0"/>
+                <a:latin typeface="Aptos" panose="020B0004020202020204" pitchFamily="34" charset="0"/>
               </a:rPr>
               <a:t>Rebuild the UI</a:t>
             </a:r>
             <a:endParaRPr lang="en-IT">
-              <a:latin typeface="Palatino Linotype" panose="02040502050505030304" pitchFamily="18" charset="0"/>
+              <a:latin typeface="Aptos" panose="020B0004020202020204" pitchFamily="34" charset="0"/>
             </a:endParaRPr>
           </a:p>
         </p:txBody>
@@ -10624,9 +10418,15 @@
             <a:pPr algn="ctr"/>
             <a:r>
               <a:rPr lang="en-US" dirty="0">
+                <a:latin typeface="Aptos" panose="020B0004020202020204" pitchFamily="34" charset="0"/>
+              </a:rPr>
+              <a:t>Calling</a:t>
+            </a:r>
+            <a:r>
+              <a:rPr lang="en-US" dirty="0">
                 <a:latin typeface="Palatino Linotype" panose="02040502050505030304" pitchFamily="18" charset="0"/>
               </a:rPr>
-              <a:t>Calling </a:t>
+              <a:t> </a:t>
             </a:r>
             <a:r>
               <a:rPr lang="en-US" dirty="0" err="1">
@@ -10721,7 +10521,7 @@
             <a:pPr algn="ctr"/>
             <a:r>
               <a:rPr lang="en-US" dirty="0">
-                <a:latin typeface="Palatino Linotype" panose="02040502050505030304" pitchFamily="18" charset="0"/>
+                <a:latin typeface="Aptos" panose="020B0004020202020204" pitchFamily="34" charset="0"/>
               </a:rPr>
               <a:t>&lt;See lesson 9 and 10&gt;</a:t>
             </a:r>
@@ -10759,7 +10559,7 @@
             <a:pPr algn="ctr"/>
             <a:r>
               <a:rPr lang="en-US" dirty="0">
-                <a:latin typeface="Palatino Linotype" panose="02040502050505030304" pitchFamily="18" charset="0"/>
+                <a:latin typeface="Aptos" panose="020B0004020202020204" pitchFamily="34" charset="0"/>
               </a:rPr>
               <a:t>&lt;See lesson 9 and 10&gt;</a:t>
             </a:r>
@@ -10797,7 +10597,7 @@
             <a:pPr algn="ctr"/>
             <a:r>
               <a:rPr lang="en-US" dirty="0">
-                <a:latin typeface="Palatino Linotype" panose="02040502050505030304" pitchFamily="18" charset="0"/>
+                <a:latin typeface="Aptos" panose="020B0004020202020204" pitchFamily="34" charset="0"/>
               </a:rPr>
               <a:t>In a class dedicated to communicate with IMPACT</a:t>
             </a:r>
@@ -10835,7 +10635,7 @@
             <a:pPr algn="ctr"/>
             <a:r>
               <a:rPr lang="en-US" dirty="0">
-                <a:latin typeface="Palatino Linotype" panose="02040502050505030304" pitchFamily="18" charset="0"/>
+                <a:latin typeface="Aptos" panose="020B0004020202020204" pitchFamily="34" charset="0"/>
               </a:rPr>
               <a:t>Many options, e.g., using a button, automatically done if something happen…</a:t>
             </a:r>
@@ -11093,25 +10893,25 @@
             <a:pPr algn="ctr"/>
             <a:r>
               <a:rPr lang="en-US" dirty="0">
-                <a:latin typeface="Palatino Linotype" panose="02040502050505030304" pitchFamily="18" charset="0"/>
+                <a:latin typeface="Aptos" panose="020B0004020202020204" pitchFamily="34" charset="0"/>
               </a:rPr>
               <a:t>Flutter c</a:t>
             </a:r>
             <a:r>
               <a:rPr lang="en-IT">
-                <a:latin typeface="Palatino Linotype" panose="02040502050505030304" pitchFamily="18" charset="0"/>
+                <a:latin typeface="Aptos" panose="020B0004020202020204" pitchFamily="34" charset="0"/>
               </a:rPr>
               <a:t>all</a:t>
             </a:r>
             <a:r>
               <a:rPr lang="en-US" dirty="0">
-                <a:latin typeface="Palatino Linotype" panose="02040502050505030304" pitchFamily="18" charset="0"/>
+                <a:latin typeface="Aptos" panose="020B0004020202020204" pitchFamily="34" charset="0"/>
               </a:rPr>
               <a:t>s</a:t>
             </a:r>
             <a:r>
               <a:rPr lang="en-IT">
-                <a:latin typeface="Palatino Linotype" panose="02040502050505030304" pitchFamily="18" charset="0"/>
+                <a:latin typeface="Aptos" panose="020B0004020202020204" pitchFamily="34" charset="0"/>
               </a:rPr>
               <a:t> </a:t>
             </a:r>
@@ -11123,7 +10923,7 @@
             </a:r>
             <a:r>
               <a:rPr lang="en-IT" dirty="0">
-                <a:latin typeface="Palatino Linotype" panose="02040502050505030304" pitchFamily="18" charset="0"/>
+                <a:latin typeface="Aptos" panose="020B0004020202020204" pitchFamily="34" charset="0"/>
               </a:rPr>
               <a:t>method</a:t>
             </a:r>
@@ -11855,12 +11655,12 @@
           <a:p>
             <a:r>
               <a:rPr lang="en-GB" sz="1600" dirty="0">
-                <a:latin typeface="Palatino Linotype" panose="02040502050505030304" pitchFamily="18" charset="0"/>
+                <a:latin typeface="Aptos" panose="020B0004020202020204" pitchFamily="34" charset="0"/>
               </a:rPr>
               <a:t>Inject an instance to</a:t>
             </a:r>
             <a:endParaRPr lang="en-IT" sz="1600" dirty="0">
-              <a:latin typeface="Palatino Linotype" panose="02040502050505030304" pitchFamily="18" charset="0"/>
+              <a:latin typeface="Aptos" panose="020B0004020202020204" pitchFamily="34" charset="0"/>
             </a:endParaRPr>
           </a:p>
         </p:txBody>
@@ -12044,12 +11844,12 @@
             <a:pPr algn="ctr"/>
             <a:r>
               <a:rPr lang="en-US" dirty="0">
-                <a:latin typeface="Palatino Linotype" panose="02040502050505030304" pitchFamily="18" charset="0"/>
+                <a:latin typeface="Aptos" panose="020B0004020202020204" pitchFamily="34" charset="0"/>
               </a:rPr>
               <a:t>“Event” that asks to fetch data</a:t>
             </a:r>
             <a:endParaRPr lang="en-IT" dirty="0">
-              <a:latin typeface="Palatino Linotype" panose="02040502050505030304" pitchFamily="18" charset="0"/>
+              <a:latin typeface="Aptos" panose="020B0004020202020204" pitchFamily="34" charset="0"/>
             </a:endParaRPr>
           </a:p>
         </p:txBody>
@@ -12097,7 +11897,7 @@
             <a:pPr algn="ctr"/>
             <a:r>
               <a:rPr lang="en-IT" dirty="0">
-                <a:latin typeface="Palatino Linotype" panose="02040502050505030304" pitchFamily="18" charset="0"/>
+                <a:latin typeface="Aptos" panose="020B0004020202020204" pitchFamily="34" charset="0"/>
               </a:rPr>
               <a:t>Access token expired?</a:t>
             </a:r>
@@ -12406,6 +12206,7 @@
                 <a:solidFill>
                   <a:srgbClr val="C00000"/>
                 </a:solidFill>
+                <a:latin typeface="Aptos" panose="020B0004020202020204" pitchFamily="34" charset="0"/>
               </a:rPr>
               <a:t>YES</a:t>
             </a:r>
@@ -12628,6 +12429,7 @@
                 <a:solidFill>
                   <a:srgbClr val="C00000"/>
                 </a:solidFill>
+                <a:latin typeface="Aptos" panose="020B0004020202020204" pitchFamily="34" charset="0"/>
               </a:rPr>
               <a:t>NO</a:t>
             </a:r>
@@ -12677,7 +12479,7 @@
             <a:pPr algn="ctr"/>
             <a:r>
               <a:rPr lang="en-IT" dirty="0">
-                <a:latin typeface="Palatino Linotype" panose="02040502050505030304" pitchFamily="18" charset="0"/>
+                <a:latin typeface="Aptos" panose="020B0004020202020204" pitchFamily="34" charset="0"/>
               </a:rPr>
               <a:t>Make a call to get data using access token</a:t>
             </a:r>
@@ -12727,7 +12529,7 @@
             <a:pPr algn="ctr"/>
             <a:r>
               <a:rPr lang="en-IT" dirty="0">
-                <a:latin typeface="Palatino Linotype" panose="02040502050505030304" pitchFamily="18" charset="0"/>
+                <a:latin typeface="Aptos" panose="020B0004020202020204" pitchFamily="34" charset="0"/>
               </a:rPr>
               <a:t>Refresh token expired?</a:t>
             </a:r>
@@ -12819,7 +12621,7 @@
             <a:pPr algn="ctr"/>
             <a:r>
               <a:rPr lang="en-IT" dirty="0">
-                <a:latin typeface="Palatino Linotype" panose="02040502050505030304" pitchFamily="18" charset="0"/>
+                <a:latin typeface="Aptos" panose="020B0004020202020204" pitchFamily="34" charset="0"/>
               </a:rPr>
               <a:t>Get a new token pair using the refresh token and store it</a:t>
             </a:r>
@@ -13042,6 +12844,7 @@
                 <a:solidFill>
                   <a:srgbClr val="C00000"/>
                 </a:solidFill>
+                <a:latin typeface="Aptos" panose="020B0004020202020204" pitchFamily="34" charset="0"/>
               </a:rPr>
               <a:t>NO</a:t>
             </a:r>
@@ -13350,6 +13153,7 @@
                 <a:solidFill>
                   <a:srgbClr val="C00000"/>
                 </a:solidFill>
+                <a:latin typeface="Aptos" panose="020B0004020202020204" pitchFamily="34" charset="0"/>
               </a:rPr>
               <a:t>YES</a:t>
             </a:r>
@@ -13399,7 +13203,7 @@
             <a:pPr algn="ctr"/>
             <a:r>
               <a:rPr lang="en-IT" dirty="0">
-                <a:latin typeface="Palatino Linotype" panose="02040502050505030304" pitchFamily="18" charset="0"/>
+                <a:latin typeface="Aptos" panose="020B0004020202020204" pitchFamily="34" charset="0"/>
               </a:rPr>
               <a:t>Use credentials to ask for a JWT token pair</a:t>
             </a:r>
@@ -13449,7 +13253,7 @@
             <a:pPr algn="ctr"/>
             <a:r>
               <a:rPr lang="en-IT" dirty="0">
-                <a:latin typeface="Palatino Linotype" panose="02040502050505030304" pitchFamily="18" charset="0"/>
+                <a:latin typeface="Aptos" panose="020B0004020202020204" pitchFamily="34" charset="0"/>
               </a:rPr>
               <a:t>Receive JWT token pair</a:t>
             </a:r>
@@ -13499,7 +13303,7 @@
             <a:pPr algn="ctr"/>
             <a:r>
               <a:rPr lang="en-IT" dirty="0">
-                <a:latin typeface="Palatino Linotype" panose="02040502050505030304" pitchFamily="18" charset="0"/>
+                <a:latin typeface="Aptos" panose="020B0004020202020204" pitchFamily="34" charset="0"/>
               </a:rPr>
               <a:t>Store token pair for making calls</a:t>
             </a:r>
@@ -13762,12 +13566,12 @@
             <a:pPr algn="ctr"/>
             <a:r>
               <a:rPr lang="en-US" dirty="0">
-                <a:latin typeface="Palatino Linotype" panose="02040502050505030304" pitchFamily="18" charset="0"/>
+                <a:latin typeface="Aptos" panose="020B0004020202020204" pitchFamily="34" charset="0"/>
               </a:rPr>
               <a:t>”Manage” response</a:t>
             </a:r>
             <a:endParaRPr lang="en-IT" dirty="0">
-              <a:latin typeface="Palatino Linotype" panose="02040502050505030304" pitchFamily="18" charset="0"/>
+              <a:latin typeface="Aptos" panose="020B0004020202020204" pitchFamily="34" charset="0"/>
             </a:endParaRPr>
           </a:p>
         </p:txBody>
@@ -14005,12 +13809,12 @@
             </a:r>
             <a:r>
               <a:rPr lang="en-US" dirty="0">
-                <a:latin typeface="Palatino Linotype" panose="02040502050505030304" pitchFamily="18" charset="0"/>
+                <a:latin typeface="Aptos" panose="020B0004020202020204" pitchFamily="34" charset="0"/>
               </a:rPr>
               <a:t>if needed</a:t>
             </a:r>
             <a:endParaRPr lang="en-IT">
-              <a:latin typeface="Palatino Linotype" panose="02040502050505030304" pitchFamily="18" charset="0"/>
+              <a:latin typeface="Aptos" panose="020B0004020202020204" pitchFamily="34" charset="0"/>
             </a:endParaRPr>
           </a:p>
         </p:txBody>
@@ -14322,18 +14126,26 @@
           </a:lstStyle>
           <a:p>
             <a:r>
-              <a:rPr lang="en-IT" dirty="0"/>
+              <a:rPr lang="en-IT" dirty="0">
+                <a:latin typeface="Aptos" panose="020B0004020202020204" pitchFamily="34" charset="0"/>
+              </a:rPr>
               <a:t>Let’s </a:t>
             </a:r>
             <a:r>
-              <a:rPr lang="en-IT"/>
+              <a:rPr lang="en-IT">
+                <a:latin typeface="Aptos" panose="020B0004020202020204" pitchFamily="34" charset="0"/>
+              </a:rPr>
               <a:t>implement </a:t>
             </a:r>
             <a:r>
-              <a:rPr lang="en-US" dirty="0"/>
+              <a:rPr lang="en-US" dirty="0">
+                <a:latin typeface="Aptos" panose="020B0004020202020204" pitchFamily="34" charset="0"/>
+              </a:rPr>
               <a:t>a simple application that, after tapping a button, generates a plot showing yesterday’s steps. </a:t>
             </a:r>
-            <a:endParaRPr lang="en-IT" b="1" dirty="0"/>
+            <a:endParaRPr lang="en-IT" b="1" dirty="0">
+              <a:latin typeface="Aptos" panose="020B0004020202020204" pitchFamily="34" charset="0"/>
+            </a:endParaRPr>
           </a:p>
         </p:txBody>
       </p:sp>
@@ -14555,54 +14367,63 @@
             </a:pPr>
             <a:r>
               <a:rPr lang="en-IT" sz="1600" dirty="0">
+                <a:latin typeface="Aptos" panose="020B0004020202020204" pitchFamily="34" charset="0"/>
                 <a:ea typeface="Palatino" pitchFamily="2" charset="77"/>
               </a:rPr>
               <a:t>Full example in lab</a:t>
             </a:r>
             <a:r>
               <a:rPr lang="en-IT" sz="1600">
+                <a:latin typeface="Aptos" panose="020B0004020202020204" pitchFamily="34" charset="0"/>
                 <a:ea typeface="Palatino" pitchFamily="2" charset="77"/>
               </a:rPr>
               <a:t>_1</a:t>
             </a:r>
             <a:r>
               <a:rPr lang="en-US" sz="1600" dirty="0">
+                <a:latin typeface="Aptos" panose="020B0004020202020204" pitchFamily="34" charset="0"/>
                 <a:ea typeface="Palatino" pitchFamily="2" charset="77"/>
               </a:rPr>
               <a:t>1</a:t>
             </a:r>
             <a:r>
               <a:rPr lang="en-IT" sz="1600">
+                <a:latin typeface="Aptos" panose="020B0004020202020204" pitchFamily="34" charset="0"/>
                 <a:ea typeface="Palatino" pitchFamily="2" charset="77"/>
               </a:rPr>
               <a:t>-</a:t>
             </a:r>
             <a:r>
               <a:rPr lang="en-US" sz="1600" dirty="0" err="1">
+                <a:latin typeface="Aptos" panose="020B0004020202020204" pitchFamily="34" charset="0"/>
                 <a:ea typeface="Palatino" pitchFamily="2" charset="77"/>
               </a:rPr>
               <a:t>linking_state_management_with_networking</a:t>
             </a:r>
             <a:r>
               <a:rPr lang="en-IT" sz="1600">
+                <a:latin typeface="Aptos" panose="020B0004020202020204" pitchFamily="34" charset="0"/>
                 <a:ea typeface="Palatino" pitchFamily="2" charset="77"/>
               </a:rPr>
               <a:t>/</a:t>
             </a:r>
             <a:r>
               <a:rPr lang="en-US" sz="1600" dirty="0">
+                <a:latin typeface="Aptos" panose="020B0004020202020204" pitchFamily="34" charset="0"/>
                 <a:ea typeface="Palatino" pitchFamily="2" charset="77"/>
               </a:rPr>
               <a:t>visualize</a:t>
             </a:r>
             <a:r>
               <a:rPr lang="en-IT" sz="1600">
+                <a:latin typeface="Aptos" panose="020B0004020202020204" pitchFamily="34" charset="0"/>
                 <a:ea typeface="Palatino" pitchFamily="2" charset="77"/>
               </a:rPr>
               <a:t>_</a:t>
             </a:r>
             <a:r>
               <a:rPr lang="en-IT" sz="1600" dirty="0">
+                <a:latin typeface="Aptos" panose="020B0004020202020204" pitchFamily="34" charset="0"/>
                 <a:ea typeface="Palatino" pitchFamily="2" charset="77"/>
               </a:rPr>
               <a:t>step/</a:t>
